--- a/Msc_Thesis_Update.pptx
+++ b/Msc_Thesis_Update.pptx
@@ -5,10 +5,10 @@
     <p:sldMasterId id="2147483662" r:id="rId14"/>
   </p:sldMasterIdLst>
   <p:notesMasterIdLst>
-    <p:notesMasterId r:id="rId30"/>
+    <p:notesMasterId r:id="rId31"/>
   </p:notesMasterIdLst>
   <p:handoutMasterIdLst>
-    <p:handoutMasterId r:id="rId31"/>
+    <p:handoutMasterId r:id="rId32"/>
   </p:handoutMasterIdLst>
   <p:sldIdLst>
     <p:sldId id="500" r:id="rId15"/>
@@ -25,12 +25,13 @@
     <p:sldId id="509" r:id="rId26"/>
     <p:sldId id="507" r:id="rId27"/>
     <p:sldId id="513" r:id="rId28"/>
-    <p:sldId id="501" r:id="rId29"/>
+    <p:sldId id="514" r:id="rId29"/>
+    <p:sldId id="501" r:id="rId30"/>
   </p:sldIdLst>
   <p:sldSz cx="12190413" cy="6858000"/>
   <p:notesSz cx="6858000" cy="9144000"/>
   <p:custDataLst>
-    <p:tags r:id="rId32"/>
+    <p:tags r:id="rId33"/>
   </p:custDataLst>
   <p:defaultTextStyle>
     <a:defPPr>
@@ -10912,6 +10913,238 @@
       </p:grpSpPr>
       <p:sp>
         <p:nvSpPr>
+          <p:cNvPr id="2" name="Title 1">
+            <a:extLst>
+              <a:ext uri="{FF2B5EF4-FFF2-40B4-BE49-F238E27FC236}">
+                <a16:creationId xmlns:a16="http://schemas.microsoft.com/office/drawing/2014/main" id="{F99D45F2-B9D6-B7BF-4231-F73B9ADBAC81}"/>
+              </a:ext>
+            </a:extLst>
+          </p:cNvPr>
+          <p:cNvSpPr>
+            <a:spLocks noGrp="1"/>
+          </p:cNvSpPr>
+          <p:nvPr>
+            <p:ph type="title"/>
+          </p:nvPr>
+        </p:nvSpPr>
+        <p:spPr/>
+        <p:txBody>
+          <a:bodyPr/>
+          <a:lstStyle/>
+          <a:p>
+            <a:r>
+              <a:rPr lang="en-US" dirty="0"/>
+              <a:t>Updates</a:t>
+            </a:r>
+            <a:endParaRPr lang="en-DK" dirty="0"/>
+          </a:p>
+        </p:txBody>
+      </p:sp>
+      <p:sp>
+        <p:nvSpPr>
+          <p:cNvPr id="3" name="Content Placeholder 2">
+            <a:extLst>
+              <a:ext uri="{FF2B5EF4-FFF2-40B4-BE49-F238E27FC236}">
+                <a16:creationId xmlns:a16="http://schemas.microsoft.com/office/drawing/2014/main" id="{75030F43-BEF9-1EFE-717B-6DB2A37DA47A}"/>
+              </a:ext>
+            </a:extLst>
+          </p:cNvPr>
+          <p:cNvSpPr>
+            <a:spLocks noGrp="1"/>
+          </p:cNvSpPr>
+          <p:nvPr>
+            <p:ph idx="1"/>
+          </p:nvPr>
+        </p:nvSpPr>
+        <p:spPr/>
+        <p:txBody>
+          <a:bodyPr/>
+          <a:lstStyle/>
+          <a:p>
+            <a:pPr>
+              <a:buFontTx/>
+              <a:buChar char="-"/>
+            </a:pPr>
+            <a:r>
+              <a:rPr lang="en-US" dirty="0"/>
+              <a:t>Managed to simulate Biogas Demand via a store with (500,00 t) Biomass</a:t>
+            </a:r>
+          </a:p>
+          <a:p>
+            <a:pPr>
+              <a:buFontTx/>
+              <a:buChar char="-"/>
+            </a:pPr>
+            <a:r>
+              <a:rPr lang="en-US" dirty="0"/>
+              <a:t>And Load for Biogas 200 GWh, but only at the last timestep (Alberto´s Method)</a:t>
+            </a:r>
+          </a:p>
+          <a:p>
+            <a:pPr>
+              <a:buFontTx/>
+              <a:buChar char="-"/>
+            </a:pPr>
+            <a:r>
+              <a:rPr lang="en-US" dirty="0"/>
+              <a:t>Makes Pyrolysis the Baseline/Dominant Heat provider in the system </a:t>
+            </a:r>
+          </a:p>
+          <a:p>
+            <a:pPr>
+              <a:buFontTx/>
+              <a:buChar char="-"/>
+            </a:pPr>
+            <a:r>
+              <a:rPr lang="en-US" dirty="0"/>
+              <a:t>RONDO was still used more in 2024 in updated model</a:t>
+            </a:r>
+          </a:p>
+          <a:p>
+            <a:pPr marL="0" indent="0">
+              <a:buNone/>
+            </a:pPr>
+            <a:endParaRPr lang="en-US" dirty="0"/>
+          </a:p>
+          <a:p>
+            <a:pPr marL="0" indent="0">
+              <a:buNone/>
+            </a:pPr>
+            <a:endParaRPr lang="en-US" dirty="0"/>
+          </a:p>
+          <a:p>
+            <a:pPr marL="0" indent="0">
+              <a:buNone/>
+            </a:pPr>
+            <a:endParaRPr lang="en-US" dirty="0"/>
+          </a:p>
+          <a:p>
+            <a:pPr marL="0" indent="0">
+              <a:buNone/>
+            </a:pPr>
+            <a:endParaRPr lang="en-DK" dirty="0"/>
+          </a:p>
+        </p:txBody>
+      </p:sp>
+      <p:sp>
+        <p:nvSpPr>
+          <p:cNvPr id="4" name="Footer Placeholder 3">
+            <a:extLst>
+              <a:ext uri="{FF2B5EF4-FFF2-40B4-BE49-F238E27FC236}">
+                <a16:creationId xmlns:a16="http://schemas.microsoft.com/office/drawing/2014/main" id="{D13A5870-C148-BF62-4C99-DBE415D3CD72}"/>
+              </a:ext>
+            </a:extLst>
+          </p:cNvPr>
+          <p:cNvSpPr>
+            <a:spLocks noGrp="1"/>
+          </p:cNvSpPr>
+          <p:nvPr>
+            <p:ph type="ftr" sz="quarter" idx="10"/>
+          </p:nvPr>
+        </p:nvSpPr>
+        <p:spPr/>
+        <p:txBody>
+          <a:bodyPr/>
+          <a:lstStyle/>
+          <a:p>
+            <a:r>
+              <a:rPr lang="en-GB"/>
+              <a:t>Footer</a:t>
+            </a:r>
+            <a:endParaRPr lang="en-GB" dirty="0"/>
+          </a:p>
+        </p:txBody>
+      </p:sp>
+      <p:sp>
+        <p:nvSpPr>
+          <p:cNvPr id="5" name="Slide Number Placeholder 4">
+            <a:extLst>
+              <a:ext uri="{FF2B5EF4-FFF2-40B4-BE49-F238E27FC236}">
+                <a16:creationId xmlns:a16="http://schemas.microsoft.com/office/drawing/2014/main" id="{BD049FF9-1AA0-78CC-4214-AB43E77D5459}"/>
+              </a:ext>
+            </a:extLst>
+          </p:cNvPr>
+          <p:cNvSpPr>
+            <a:spLocks noGrp="1"/>
+          </p:cNvSpPr>
+          <p:nvPr>
+            <p:ph type="sldNum" sz="quarter" idx="11"/>
+          </p:nvPr>
+        </p:nvSpPr>
+        <p:spPr/>
+        <p:txBody>
+          <a:bodyPr/>
+          <a:lstStyle/>
+          <a:p>
+            <a:fld id="{103EA872-A674-449B-A120-B97244F8E91D}" type="slidenum">
+              <a:rPr lang="en-GB" smtClean="0"/>
+              <a:pPr/>
+              <a:t>15</a:t>
+            </a:fld>
+            <a:endParaRPr lang="en-GB" dirty="0"/>
+          </a:p>
+        </p:txBody>
+      </p:sp>
+      <p:sp>
+        <p:nvSpPr>
+          <p:cNvPr id="6" name="Date Placeholder 5">
+            <a:extLst>
+              <a:ext uri="{FF2B5EF4-FFF2-40B4-BE49-F238E27FC236}">
+                <a16:creationId xmlns:a16="http://schemas.microsoft.com/office/drawing/2014/main" id="{3B355821-840A-5860-8228-0DB6F8E048B8}"/>
+              </a:ext>
+            </a:extLst>
+          </p:cNvPr>
+          <p:cNvSpPr>
+            <a:spLocks noGrp="1"/>
+          </p:cNvSpPr>
+          <p:nvPr>
+            <p:ph type="dt" sz="half" idx="12"/>
+          </p:nvPr>
+        </p:nvSpPr>
+        <p:spPr/>
+        <p:txBody>
+          <a:bodyPr/>
+          <a:lstStyle/>
+          <a:p>
+            <a:r>
+              <a:rPr lang="en-GB"/>
+              <a:t>Date</a:t>
+            </a:r>
+          </a:p>
+        </p:txBody>
+      </p:sp>
+    </p:spTree>
+    <p:extLst>
+      <p:ext uri="{BB962C8B-B14F-4D97-AF65-F5344CB8AC3E}">
+        <p14:creationId xmlns:p14="http://schemas.microsoft.com/office/powerpoint/2010/main" val="2510988591"/>
+      </p:ext>
+    </p:extLst>
+  </p:cSld>
+  <p:clrMapOvr>
+    <a:masterClrMapping/>
+  </p:clrMapOvr>
+</p:sld>
+</file>
+
+<file path=ppt/slides/slide16.xml><?xml version="1.0" encoding="utf-8"?>
+<p:sld xmlns:a="http://schemas.openxmlformats.org/drawingml/2006/main" xmlns:r="http://schemas.openxmlformats.org/officeDocument/2006/relationships" xmlns:p="http://schemas.openxmlformats.org/presentationml/2006/main">
+  <p:cSld>
+    <p:spTree>
+      <p:nvGrpSpPr>
+        <p:cNvPr id="1" name=""/>
+        <p:cNvGrpSpPr/>
+        <p:nvPr/>
+      </p:nvGrpSpPr>
+      <p:grpSpPr>
+        <a:xfrm>
+          <a:off x="0" y="0"/>
+          <a:ext cx="0" cy="0"/>
+          <a:chOff x="0" y="0"/>
+          <a:chExt cx="0" cy="0"/>
+        </a:xfrm>
+      </p:grpSpPr>
+      <p:sp>
+        <p:nvSpPr>
           <p:cNvPr id="2" name="Footer Placeholder 1">
             <a:extLst>
               <a:ext uri="{FF2B5EF4-FFF2-40B4-BE49-F238E27FC236}">
@@ -10963,7 +11196,7 @@
             <a:fld id="{24C8C45C-947F-4981-8B3F-4F32E973C901}" type="slidenum">
               <a:rPr lang="en-GB" smtClean="0"/>
               <a:pPr/>
-              <a:t>15</a:t>
+              <a:t>16</a:t>
             </a:fld>
             <a:endParaRPr lang="en-GB" dirty="0"/>
           </a:p>
@@ -11135,48 +11368,6 @@
               <a:rPr lang="da-DK" dirty="0"/>
               <a:t>Base Scenario:</a:t>
             </a:r>
-          </a:p>
-          <a:p>
-            <a:r>
-              <a:rPr lang="en-US" dirty="0"/>
-              <a:t>H2_load = 2 MW</a:t>
-            </a:r>
-          </a:p>
-          <a:p>
-            <a:r>
-              <a:rPr lang="en-US" dirty="0" err="1"/>
-              <a:t>MeOH_load</a:t>
-            </a:r>
-            <a:r>
-              <a:rPr lang="en-US" dirty="0"/>
-              <a:t> = 1 MW</a:t>
-            </a:r>
-          </a:p>
-          <a:p>
-            <a:r>
-              <a:rPr lang="en-US" dirty="0" err="1"/>
-              <a:t>Min_MeOH_load</a:t>
-            </a:r>
-            <a:r>
-              <a:rPr lang="en-US" dirty="0"/>
-              <a:t> = 0.1 </a:t>
-            </a:r>
-            <a:r>
-              <a:rPr lang="en-US" dirty="0" err="1"/>
-              <a:t>p.u</a:t>
-            </a:r>
-            <a:endParaRPr lang="en-US" dirty="0"/>
-          </a:p>
-          <a:p>
-            <a:r>
-              <a:rPr lang="en-US" dirty="0"/>
-              <a:t>Min_H2_load = 0.15 </a:t>
-            </a:r>
-            <a:r>
-              <a:rPr lang="en-US" dirty="0" err="1"/>
-              <a:t>p.u</a:t>
-            </a:r>
-            <a:endParaRPr lang="en-US" dirty="0"/>
           </a:p>
           <a:p>
             <a:r>
@@ -12126,7 +12317,7 @@
         </p:blipFill>
         <p:spPr bwMode="auto">
           <a:xfrm>
-            <a:off x="4150990" y="116632"/>
+            <a:off x="1126654" y="188025"/>
             <a:ext cx="4669583" cy="6353175"/>
           </a:xfrm>
           <a:prstGeom prst="rect">
@@ -12139,13 +12330,6 @@
             <a:noFill/>
           </a:ln>
           <a:extLst>
-            <a:ext uri="{909E8E84-426E-40DD-AFC4-6F175D3DCCD1}">
-              <a14:hiddenFill xmlns:a14="http://schemas.microsoft.com/office/drawing/2010/main">
-                <a:solidFill>
-                  <a:schemeClr val="accent1"/>
-                </a:solidFill>
-              </a14:hiddenFill>
-            </a:ext>
             <a:ext uri="{91240B29-F687-4F45-9708-019B960494DF}">
               <a14:hiddenLine xmlns:a14="http://schemas.microsoft.com/office/drawing/2010/main" w="9525">
                 <a:solidFill>
@@ -13901,37 +14085,10 @@
 </file>
 
 <file path=customXml/item1.xml><?xml version="1.0" encoding="utf-8"?>
-<?mso-contentType ?>
-<FormTemplates xmlns="http://schemas.microsoft.com/sharepoint/v3/contenttype/forms">
-  <Display>DocumentLibraryForm</Display>
-  <Edit>DocumentLibraryForm</Edit>
-  <New>DocumentLibraryForm</New>
-</FormTemplates>
+<TemplafySlideFormConfiguration><![CDATA[{"formFields":[],"formDataEntries":[]}]]></TemplafySlideFormConfiguration>
 </file>
 
 <file path=customXml/item10.xml><?xml version="1.0" encoding="utf-8"?>
-<p:properties xmlns:p="http://schemas.microsoft.com/office/2006/metadata/properties" xmlns:xsi="http://www.w3.org/2001/XMLSchema-instance" xmlns:pc="http://schemas.microsoft.com/office/infopath/2007/PartnerControls">
-  <documentManagement/>
-</p:properties>
-</file>
-
-<file path=customXml/item11.xml><?xml version="1.0" encoding="utf-8"?>
-<TemplafyTemplateConfiguration><![CDATA[{"elementsMetadata":[{"type":"shape","id":"760c0b01-e6e8-4844-b6e1-1dc9fa2aa3a0","elementConfiguration":{"binding":"UserProfile.Offices.Workarea_{{DocumentLanguage}}","disableUpdates":false,"type":"text"}},{"type":"shape","id":"d52388ce-2b60-421d-b542-b927e7f7ca5d","elementConfiguration":{"format":"{{DateFormats.GeneralDate}}","binding":"Form.Date","disableUpdates":false,"type":"date"}},{"type":"shape","id":"19920dab-3faa-4eb9-b064-a1f7031a4d5a","elementConfiguration":{"binding":"Form.PresentationTitle","disableUpdates":false,"type":"text"}}],"transformationConfigurations":[{"language":"{{DocumentLanguage}}","disableUpdates":false,"type":"proofingLanguage"}],"templateName":"DTU Wind Energy Template","templateDescription":"","enableDocumentContentUpdater":true,"version":"1.2"}]]></TemplafyTemplateConfiguration>
-</file>
-
-<file path=customXml/item12.xml><?xml version="1.0" encoding="utf-8"?>
-<TemplafySlideFormConfiguration><![CDATA[{"formFields":[],"formDataEntries":[]}]]></TemplafySlideFormConfiguration>
-</file>
-
-<file path=customXml/item13.xml><?xml version="1.0" encoding="utf-8"?>
-<TemplafySlideFormConfiguration><![CDATA[{"formFields":[],"formDataEntries":[]}]]></TemplafySlideFormConfiguration>
-</file>
-
-<file path=customXml/item2.xml><?xml version="1.0" encoding="utf-8"?>
-<TemplafySlideFormConfiguration><![CDATA[{"formFields":[],"formDataEntries":[]}]]></TemplafySlideFormConfiguration>
-</file>
-
-<file path=customXml/item3.xml><?xml version="1.0" encoding="utf-8"?>
 <ct:contentTypeSchema xmlns:ct="http://schemas.microsoft.com/office/2006/metadata/contentType" xmlns:ma="http://schemas.microsoft.com/office/2006/metadata/properties/metaAttributes" ct:_="" ma:_="" ma:contentTypeName="Document" ma:contentTypeID="0x0101009ADA1FD2B40FDA458284BB6FCA763489" ma:contentTypeVersion="5" ma:contentTypeDescription="Create a new document." ma:contentTypeScope="" ma:versionID="72b2569ebc96083092f6d8e76413cd52">
   <xsd:schema xmlns:xsd="http://www.w3.org/2001/XMLSchema" xmlns:xs="http://www.w3.org/2001/XMLSchema" xmlns:p="http://schemas.microsoft.com/office/2006/metadata/properties" xmlns:ns2="683dcda1-f8c3-442f-ae64-e236c052732d" xmlns:ns3="715bde23-c48d-41ea-a697-dffaa8fbae8d" targetNamespace="http://schemas.microsoft.com/office/2006/metadata/properties" ma:root="true" ma:fieldsID="df14c340b530a7b5c38005fefa6a5693" ns2:_="" ns3:_="">
     <xsd:import namespace="683dcda1-f8c3-442f-ae64-e236c052732d"/>
@@ -14102,8 +14259,33 @@
 </ct:contentTypeSchema>
 </file>
 
+<file path=customXml/item11.xml><?xml version="1.0" encoding="utf-8"?>
+<TemplafySlideFormConfiguration><![CDATA[{"formFields":[],"formDataEntries":[]}]]></TemplafySlideFormConfiguration>
+</file>
+
+<file path=customXml/item12.xml><?xml version="1.0" encoding="utf-8"?>
+<TemplafyFormConfiguration><![CDATA[{"formFields":[{"required":false,"helpTexts":{"prefix":"","postfix":""},"spacing":{},"type":"datePicker","name":"Date","label":"Date","fullyQualifiedName":"Date"},{"required":false,"placeholder":"","lines":0,"helpTexts":{"prefix":"","postfix":""},"spacing":{},"type":"textBox","name":"PresentationTitle","label":"Presentation title","fullyQualifiedName":"PresentationTitle"}],"formDataEntries":[]}]]></TemplafyFormConfiguration>
+</file>
+
+<file path=customXml/item13.xml><?xml version="1.0" encoding="utf-8"?>
+<TemplafySlideFormConfiguration><![CDATA[{"formFields":[],"formDataEntries":[]}]]></TemplafySlideFormConfiguration>
+</file>
+
+<file path=customXml/item2.xml><?xml version="1.0" encoding="utf-8"?>
+<?mso-contentType ?>
+<FormTemplates xmlns="http://schemas.microsoft.com/sharepoint/v3/contenttype/forms">
+  <Display>DocumentLibraryForm</Display>
+  <Edit>DocumentLibraryForm</Edit>
+  <New>DocumentLibraryForm</New>
+</FormTemplates>
+</file>
+
+<file path=customXml/item3.xml><?xml version="1.0" encoding="utf-8"?>
+<TemplafySlideTemplateConfiguration><![CDATA[{"documentContentValidatorConfiguration":{"enableDocumentContentValidator":false,"documentContentValidatorVersion":0},"elementsMetadata":[],"slideId":"637582373565942579","enableDocumentContentUpdater":true,"version":"1.2"}]]></TemplafySlideTemplateConfiguration>
+</file>
+
 <file path=customXml/item4.xml><?xml version="1.0" encoding="utf-8"?>
-<TemplafySlideFormConfiguration><![CDATA[{"formFields":[],"formDataEntries":[]}]]></TemplafySlideFormConfiguration>
+<TemplafyTemplateConfiguration><![CDATA[{"elementsMetadata":[{"type":"shape","id":"760c0b01-e6e8-4844-b6e1-1dc9fa2aa3a0","elementConfiguration":{"binding":"UserProfile.Offices.Workarea_{{DocumentLanguage}}","disableUpdates":false,"type":"text"}},{"type":"shape","id":"d52388ce-2b60-421d-b542-b927e7f7ca5d","elementConfiguration":{"format":"{{DateFormats.GeneralDate}}","binding":"Form.Date","disableUpdates":false,"type":"date"}},{"type":"shape","id":"19920dab-3faa-4eb9-b064-a1f7031a4d5a","elementConfiguration":{"binding":"Form.PresentationTitle","disableUpdates":false,"type":"text"}}],"transformationConfigurations":[{"language":"{{DocumentLanguage}}","disableUpdates":false,"type":"proofingLanguage"}],"templateName":"DTU Wind Energy Template","templateDescription":"","enableDocumentContentUpdater":true,"version":"1.2"}]]></TemplafyTemplateConfiguration>
 </file>
 
 <file path=customXml/item5.xml><?xml version="1.0" encoding="utf-8"?>
@@ -14111,63 +14293,30 @@
 </file>
 
 <file path=customXml/item6.xml><?xml version="1.0" encoding="utf-8"?>
-<TemplafySlideTemplateConfiguration><![CDATA[{"documentContentValidatorConfiguration":{"enableDocumentContentValidator":false,"documentContentValidatorVersion":0},"elementsMetadata":[],"slideId":"637582373565942579","enableDocumentContentUpdater":true,"version":"1.2"}]]></TemplafySlideTemplateConfiguration>
+<p:properties xmlns:p="http://schemas.microsoft.com/office/2006/metadata/properties" xmlns:xsi="http://www.w3.org/2001/XMLSchema-instance" xmlns:pc="http://schemas.microsoft.com/office/infopath/2007/PartnerControls">
+  <documentManagement/>
+</p:properties>
 </file>
 
 <file path=customXml/item7.xml><?xml version="1.0" encoding="utf-8"?>
-<TemplafyFormConfiguration><![CDATA[{"formFields":[{"required":false,"helpTexts":{"prefix":"","postfix":""},"spacing":{},"type":"datePicker","name":"Date","label":"Date","fullyQualifiedName":"Date"},{"required":false,"placeholder":"","lines":0,"helpTexts":{"prefix":"","postfix":""},"spacing":{},"type":"textBox","name":"PresentationTitle","label":"Presentation title","fullyQualifiedName":"PresentationTitle"}],"formDataEntries":[]}]]></TemplafyFormConfiguration>
+<TemplafySlideFormConfiguration><![CDATA[{"formFields":[],"formDataEntries":[]}]]></TemplafySlideFormConfiguration>
 </file>
 
 <file path=customXml/item8.xml><?xml version="1.0" encoding="utf-8"?>
+<TemplafySlideTemplateConfiguration><![CDATA[{"documentContentValidatorConfiguration":{"enableDocumentContentValidator":false,"documentContentValidatorVersion":0},"elementsMetadata":[],"slideId":"637582373566098804","enableDocumentContentUpdater":true,"version":"1.2"}]]></TemplafySlideTemplateConfiguration>
+</file>
+
+<file path=customXml/item9.xml><?xml version="1.0" encoding="utf-8"?>
 <TemplafySlideTemplateConfiguration><![CDATA[{"documentContentValidatorConfiguration":{"enableDocumentContentValidator":false,"documentContentValidatorVersion":0},"elementsMetadata":[],"slideId":"636822015789305408","enableDocumentContentUpdater":true,"version":"1.2"}]]></TemplafySlideTemplateConfiguration>
 </file>
 
-<file path=customXml/item9.xml><?xml version="1.0" encoding="utf-8"?>
-<TemplafySlideTemplateConfiguration><![CDATA[{"documentContentValidatorConfiguration":{"enableDocumentContentValidator":false,"documentContentValidatorVersion":0},"elementsMetadata":[],"slideId":"637582373566098804","enableDocumentContentUpdater":true,"version":"1.2"}]]></TemplafySlideTemplateConfiguration>
-</file>
-
 <file path=customXml/itemProps1.xml><?xml version="1.0" encoding="utf-8"?>
-<ds:datastoreItem xmlns:ds="http://schemas.openxmlformats.org/officeDocument/2006/customXml" ds:itemID="{130D490B-E977-43FF-A2D1-8C2447D6F702}">
-  <ds:schemaRefs>
-    <ds:schemaRef ds:uri="http://schemas.microsoft.com/sharepoint/v3/contenttype/forms"/>
-  </ds:schemaRefs>
-</ds:datastoreItem>
-</file>
-
-<file path=customXml/itemProps10.xml><?xml version="1.0" encoding="utf-8"?>
-<ds:datastoreItem xmlns:ds="http://schemas.openxmlformats.org/officeDocument/2006/customXml" ds:itemID="{AF32439C-8EF2-469F-A487-C82C55E480DE}">
-  <ds:schemaRefs>
-    <ds:schemaRef ds:uri="http://schemas.microsoft.com/office/2006/metadata/properties"/>
-    <ds:schemaRef ds:uri="http://schemas.microsoft.com/office/infopath/2007/PartnerControls"/>
-  </ds:schemaRefs>
-</ds:datastoreItem>
-</file>
-
-<file path=customXml/itemProps11.xml><?xml version="1.0" encoding="utf-8"?>
-<ds:datastoreItem xmlns:ds="http://schemas.openxmlformats.org/officeDocument/2006/customXml" ds:itemID="{1334258C-C3E7-4029-A615-C886A240FB15}">
-  <ds:schemaRefs/>
-</ds:datastoreItem>
-</file>
-
-<file path=customXml/itemProps12.xml><?xml version="1.0" encoding="utf-8"?>
-<ds:datastoreItem xmlns:ds="http://schemas.openxmlformats.org/officeDocument/2006/customXml" ds:itemID="{256B63E5-69B6-464D-863A-E47835EE7289}">
-  <ds:schemaRefs/>
-</ds:datastoreItem>
-</file>
-
-<file path=customXml/itemProps13.xml><?xml version="1.0" encoding="utf-8"?>
-<ds:datastoreItem xmlns:ds="http://schemas.openxmlformats.org/officeDocument/2006/customXml" ds:itemID="{89E65983-BEBD-4684-8266-29F51A82FD68}">
-  <ds:schemaRefs/>
-</ds:datastoreItem>
-</file>
-
-<file path=customXml/itemProps2.xml><?xml version="1.0" encoding="utf-8"?>
 <ds:datastoreItem xmlns:ds="http://schemas.openxmlformats.org/officeDocument/2006/customXml" ds:itemID="{09A4C5C1-E379-42C2-9CE4-96EAD0C517EB}">
   <ds:schemaRefs/>
 </ds:datastoreItem>
 </file>
 
-<file path=customXml/itemProps3.xml><?xml version="1.0" encoding="utf-8"?>
+<file path=customXml/itemProps10.xml><?xml version="1.0" encoding="utf-8"?>
 <ds:datastoreItem xmlns:ds="http://schemas.openxmlformats.org/officeDocument/2006/customXml" ds:itemID="{06B25442-D932-4BC3-89C2-322C820ADD8E}">
   <ds:schemaRefs>
     <ds:schemaRef ds:uri="http://schemas.microsoft.com/office/2006/metadata/contentType"/>
@@ -14186,8 +14335,40 @@
 </ds:datastoreItem>
 </file>
 
+<file path=customXml/itemProps11.xml><?xml version="1.0" encoding="utf-8"?>
+<ds:datastoreItem xmlns:ds="http://schemas.openxmlformats.org/officeDocument/2006/customXml" ds:itemID="{89E65983-BEBD-4684-8266-29F51A82FD68}">
+  <ds:schemaRefs/>
+</ds:datastoreItem>
+</file>
+
+<file path=customXml/itemProps12.xml><?xml version="1.0" encoding="utf-8"?>
+<ds:datastoreItem xmlns:ds="http://schemas.openxmlformats.org/officeDocument/2006/customXml" ds:itemID="{C086A146-0E09-4AA0-A3DC-33B2C18DA71A}">
+  <ds:schemaRefs/>
+</ds:datastoreItem>
+</file>
+
+<file path=customXml/itemProps13.xml><?xml version="1.0" encoding="utf-8"?>
+<ds:datastoreItem xmlns:ds="http://schemas.openxmlformats.org/officeDocument/2006/customXml" ds:itemID="{256B63E5-69B6-464D-863A-E47835EE7289}">
+  <ds:schemaRefs/>
+</ds:datastoreItem>
+</file>
+
+<file path=customXml/itemProps2.xml><?xml version="1.0" encoding="utf-8"?>
+<ds:datastoreItem xmlns:ds="http://schemas.openxmlformats.org/officeDocument/2006/customXml" ds:itemID="{130D490B-E977-43FF-A2D1-8C2447D6F702}">
+  <ds:schemaRefs>
+    <ds:schemaRef ds:uri="http://schemas.microsoft.com/sharepoint/v3/contenttype/forms"/>
+  </ds:schemaRefs>
+</ds:datastoreItem>
+</file>
+
+<file path=customXml/itemProps3.xml><?xml version="1.0" encoding="utf-8"?>
+<ds:datastoreItem xmlns:ds="http://schemas.openxmlformats.org/officeDocument/2006/customXml" ds:itemID="{FEF6F7EB-8D11-4DB2-B6C1-35C7A5D0547A}">
+  <ds:schemaRefs/>
+</ds:datastoreItem>
+</file>
+
 <file path=customXml/itemProps4.xml><?xml version="1.0" encoding="utf-8"?>
-<ds:datastoreItem xmlns:ds="http://schemas.openxmlformats.org/officeDocument/2006/customXml" ds:itemID="{45D0A120-FE3F-4A06-903C-5F2D1EDB30FB}">
+<ds:datastoreItem xmlns:ds="http://schemas.openxmlformats.org/officeDocument/2006/customXml" ds:itemID="{1334258C-C3E7-4029-A615-C886A240FB15}">
   <ds:schemaRefs/>
 </ds:datastoreItem>
 </file>
@@ -14199,25 +14380,28 @@
 </file>
 
 <file path=customXml/itemProps6.xml><?xml version="1.0" encoding="utf-8"?>
-<ds:datastoreItem xmlns:ds="http://schemas.openxmlformats.org/officeDocument/2006/customXml" ds:itemID="{FEF6F7EB-8D11-4DB2-B6C1-35C7A5D0547A}">
-  <ds:schemaRefs/>
+<ds:datastoreItem xmlns:ds="http://schemas.openxmlformats.org/officeDocument/2006/customXml" ds:itemID="{AF32439C-8EF2-469F-A487-C82C55E480DE}">
+  <ds:schemaRefs>
+    <ds:schemaRef ds:uri="http://schemas.microsoft.com/office/2006/metadata/properties"/>
+    <ds:schemaRef ds:uri="http://schemas.microsoft.com/office/infopath/2007/PartnerControls"/>
+  </ds:schemaRefs>
 </ds:datastoreItem>
 </file>
 
 <file path=customXml/itemProps7.xml><?xml version="1.0" encoding="utf-8"?>
-<ds:datastoreItem xmlns:ds="http://schemas.openxmlformats.org/officeDocument/2006/customXml" ds:itemID="{C086A146-0E09-4AA0-A3DC-33B2C18DA71A}">
+<ds:datastoreItem xmlns:ds="http://schemas.openxmlformats.org/officeDocument/2006/customXml" ds:itemID="{45D0A120-FE3F-4A06-903C-5F2D1EDB30FB}">
   <ds:schemaRefs/>
 </ds:datastoreItem>
 </file>
 
 <file path=customXml/itemProps8.xml><?xml version="1.0" encoding="utf-8"?>
-<ds:datastoreItem xmlns:ds="http://schemas.openxmlformats.org/officeDocument/2006/customXml" ds:itemID="{B917EF7A-B11F-4137-A061-E3AFCEC45668}">
+<ds:datastoreItem xmlns:ds="http://schemas.openxmlformats.org/officeDocument/2006/customXml" ds:itemID="{2EB4C41E-0201-403E-B674-C35FC9D83F82}">
   <ds:schemaRefs/>
 </ds:datastoreItem>
 </file>
 
 <file path=customXml/itemProps9.xml><?xml version="1.0" encoding="utf-8"?>
-<ds:datastoreItem xmlns:ds="http://schemas.openxmlformats.org/officeDocument/2006/customXml" ds:itemID="{2EB4C41E-0201-403E-B674-C35FC9D83F82}">
+<ds:datastoreItem xmlns:ds="http://schemas.openxmlformats.org/officeDocument/2006/customXml" ds:itemID="{B917EF7A-B11F-4137-A061-E3AFCEC45668}">
   <ds:schemaRefs/>
 </ds:datastoreItem>
 </file>